--- a/library/seminars/sem-06/rendered/sem-06-n37.pptx
+++ b/library/seminars/sem-06/rendered/sem-06-n37.pptx
@@ -580,7 +580,7 @@
           <a:p/>
           <a:p>
             <a:r>
-              <a:t>Выход, блок четвёртый: только итог. Промежуточные вызовы родителю не видны, канал односторонний.</a:t>
+              <a:t>Выход, блок четвёртый: только итог. Промежуточные вызовы вызвавшей сессии не видны, канал односторонний.</a:t>
             </a:r>
           </a:p>
           <a:p/>
@@ -610,7 +610,7 @@
           <a:p/>
           <a:p>
             <a:r>
-              <a:t>Если спросят, чего физически нет на входе: истории переписки, файлов, которые уже прочитал родитель, и автопамяти основной сессии. Это свойство устройства, не дисциплина автора роли — канала для них попросту нет. По той же причине родитель не видит промежуточных действий: задача передаётся один раз, итог возвращается один раз, диалога между ними не бывает.</a:t>
+              <a:t>Если спросят, чего физически нет на входе: истории переписки, файлов, которые уже прочитал агент вызвавшей сессии, и её автопамяти. Это свойство устройства, не дисциплина автора роли — канала для них попросту нет. По той же причине агент не видит промежуточных действий роли: задача передаётся один раз, итог возвращается один раз, диалога между ними не бывает.</a:t>
             </a:r>
           </a:p>
           <a:p/>
